--- a/Presentation and Vidoes/2024tm93544_CrossPlatformAssinment.pptx
+++ b/Presentation and Vidoes/2024tm93544_CrossPlatformAssinment.pptx
@@ -23541,7 +23541,7 @@
               <a:rPr lang="en-IN" sz="1200">
                 <a:hlinkClick r:id="rId2"/>
               </a:rPr>
-              <a:t>2024tm93544-dev/cross-platform-assignment</a:t>
+              <a:t>2024tm93593/cross-platform-assignment-1</a:t>
             </a:r>
             <a:endParaRPr sz="1200" b="0" i="0" dirty="0">
               <a:solidFill>

--- a/Presentation and Vidoes/2024tm93544_CrossPlatformAssinment.pptx
+++ b/Presentation and Vidoes/2024tm93544_CrossPlatformAssinment.pptx
@@ -23541,7 +23541,7 @@
               <a:rPr lang="en-IN" sz="1200">
                 <a:hlinkClick r:id="rId2"/>
               </a:rPr>
-              <a:t>2024tm93593/cross-platform-assignment-1</a:t>
+              <a:t>2024tm93544-dev/cross-platform-assignment-1</a:t>
             </a:r>
             <a:endParaRPr sz="1200" b="0" i="0" dirty="0">
               <a:solidFill>
